--- a/document/tests/fixtures/sample.pptx
+++ b/document/tests/fixtures/sample.pptx
@@ -46,7 +46,7 @@
           <a:bodyPr/>
           <a:p>
             <a:r>
-              <a:t>Worker, function, trigger.</a:t>
+              <a:t>Worker, function, observer.</a:t>
             </a:r>
           </a:p>
         </p:txBody>
